--- a/presentations/b05-devices-executive/B05_Devices_Executive.pptx
+++ b/presentations/b05-devices-executive/B05_Devices_Executive.pptx
@@ -128,7 +128,7 @@
   <p:extLst>
     <p:ext uri="{521415D9-36F7-43E2-AB2F-B90AF26B5E84}">
       <p14:sectionLst xmlns:p14="http://schemas.microsoft.com/office/powerpoint/2010/main">
-        <p14:section name="Why Group Policy can't come to the cloud" id="{2087e496-d104-7919-4235-96168e693923}">
+        <p14:section name="Why Group Policy can't come to the cloud" id="{4f1292ee-b768-aa97-8fd3-00310f7e89a9}">
           <p14:sldIdLst>
             <p14:sldId id="256"/>
             <p14:sldId id="257"/>
@@ -137,7 +137,7 @@
             <p14:sldId id="260"/>
           </p14:sldIdLst>
         </p14:section>
-        <p14:section name="What a governed device requires" id="{470c191e-1f7a-42b1-e2a1-2aeb4cdd2412}">
+        <p14:section name="What a governed device requires" id="{ecef567a-6cde-935b-9090-28e0c90ea955}">
           <p14:sldIdLst>
             <p14:sldId id="261"/>
             <p14:sldId id="262"/>
@@ -146,13 +146,13 @@
             <p14:sldId id="265"/>
           </p14:sldIdLst>
         </p14:section>
-        <p14:section name="Who owns the endpoint" id="{539d51c6-612d-7c99-1648-7f9d27073962}">
+        <p14:section name="Who owns the endpoint" id="{61e80394-0132-6402-670f-325d5cab4780}">
           <p14:sldIdLst>
             <p14:sldId id="266"/>
             <p14:sldId id="267"/>
           </p14:sldIdLst>
         </p14:section>
-        <p14:section name="How to sunset, migrate and evidence it" id="{3c18d2d6-c365-f9de-579a-5de1cef61b14}">
+        <p14:section name="How to sunset, migrate and evidence it" id="{27779b5c-d918-c41f-7644-56c1735a58f9}">
           <p14:sldIdLst>
             <p14:sldId id="268"/>
             <p14:sldId id="269"/>
@@ -163,7 +163,7 @@
             <p14:sldId id="274"/>
           </p14:sldIdLst>
         </p14:section>
-        <p14:section name="Backup" id="{5815c100-f369-f225-c714-c707d41e8495}">
+        <p14:section name="Backup" id="{8bfe72b2-0419-a857-353b-b83978e80258}">
           <p14:sldIdLst>
             <p14:sldId id="275"/>
             <p14:sldId id="276"/>
@@ -11033,13 +11033,7 @@
       </p:sp>
       <p:pic>
         <p:nvPicPr>
-          <p:cNvPr id="5" name="Image 0" descr="">
-            <a:extLst>
-              <a:ext uri="{C183D7F6-B498-43B3-948B-1728B52AA6E4}">
-                <adec:decorative xmlns:adec="http://schemas.microsoft.com/office/drawing/2017/decorative" val="1"/>
-              </a:ext>
-            </a:extLst>
-          </p:cNvPr>
+          <p:cNvPr id="5" name="Image 0" descr="Left to right. A slate card for the on-premises or other-cloud server running the Connected Machine agent, still domain joined until a separate decision. An arrow labeled outbound TCP 443 leads to a blue card for the Azure Arc machine resource, Microsoft.HybridCompute/machines, holding resource ID, tags, Azure RBAC and extensions. Below it, a blue card for the system-assigned managed identity in Microsoft Entra ID, connected by a dashed line. From the resource, three arrows lead to three cards on the right: a violet card, Govern, Azure Policy and machine configuration audit the security baseline; a green card, Patch, Azure Update Manager and Extended Security Updates; and a violet card, Protect and sign in, Defender for Servers onboards Defender for Endpoint, and the Entra ID sign-in extension on Windows Server 2025.">    </p:cNvPr>
           <p:cNvPicPr>
             <a:picLocks noChangeAspect="1"/>
           </p:cNvPicPr>
